--- a/prez/architecture.pptx
+++ b/prez/architecture.pptx
@@ -266,7 +266,7 @@
           <a:p>
             <a:fld id="{EC727D31-24EF-4195-9A9F-81F4CEA9F9FE}" type="datetimeFigureOut">
               <a:rPr lang="en-CA" smtClean="0"/>
-              <a:t>2026-09-03</a:t>
+              <a:t>2026-09-18</a:t>
             </a:fld>
             <a:endParaRPr lang="en-CA"/>
           </a:p>
@@ -466,7 +466,7 @@
           <a:p>
             <a:fld id="{EC727D31-24EF-4195-9A9F-81F4CEA9F9FE}" type="datetimeFigureOut">
               <a:rPr lang="en-CA" smtClean="0"/>
-              <a:t>2026-09-03</a:t>
+              <a:t>2026-09-18</a:t>
             </a:fld>
             <a:endParaRPr lang="en-CA"/>
           </a:p>
@@ -676,7 +676,7 @@
           <a:p>
             <a:fld id="{EC727D31-24EF-4195-9A9F-81F4CEA9F9FE}" type="datetimeFigureOut">
               <a:rPr lang="en-CA" smtClean="0"/>
-              <a:t>2026-09-03</a:t>
+              <a:t>2026-09-18</a:t>
             </a:fld>
             <a:endParaRPr lang="en-CA"/>
           </a:p>
@@ -876,7 +876,7 @@
           <a:p>
             <a:fld id="{EC727D31-24EF-4195-9A9F-81F4CEA9F9FE}" type="datetimeFigureOut">
               <a:rPr lang="en-CA" smtClean="0"/>
-              <a:t>2026-09-03</a:t>
+              <a:t>2026-09-18</a:t>
             </a:fld>
             <a:endParaRPr lang="en-CA"/>
           </a:p>
@@ -1152,7 +1152,7 @@
           <a:p>
             <a:fld id="{EC727D31-24EF-4195-9A9F-81F4CEA9F9FE}" type="datetimeFigureOut">
               <a:rPr lang="en-CA" smtClean="0"/>
-              <a:t>2026-09-03</a:t>
+              <a:t>2026-09-18</a:t>
             </a:fld>
             <a:endParaRPr lang="en-CA"/>
           </a:p>
@@ -1420,7 +1420,7 @@
           <a:p>
             <a:fld id="{EC727D31-24EF-4195-9A9F-81F4CEA9F9FE}" type="datetimeFigureOut">
               <a:rPr lang="en-CA" smtClean="0"/>
-              <a:t>2026-09-03</a:t>
+              <a:t>2026-09-18</a:t>
             </a:fld>
             <a:endParaRPr lang="en-CA"/>
           </a:p>
@@ -1835,7 +1835,7 @@
           <a:p>
             <a:fld id="{EC727D31-24EF-4195-9A9F-81F4CEA9F9FE}" type="datetimeFigureOut">
               <a:rPr lang="en-CA" smtClean="0"/>
-              <a:t>2026-09-03</a:t>
+              <a:t>2026-09-18</a:t>
             </a:fld>
             <a:endParaRPr lang="en-CA"/>
           </a:p>
@@ -1977,7 +1977,7 @@
           <a:p>
             <a:fld id="{EC727D31-24EF-4195-9A9F-81F4CEA9F9FE}" type="datetimeFigureOut">
               <a:rPr lang="en-CA" smtClean="0"/>
-              <a:t>2026-09-03</a:t>
+              <a:t>2026-09-18</a:t>
             </a:fld>
             <a:endParaRPr lang="en-CA"/>
           </a:p>
@@ -2090,7 +2090,7 @@
           <a:p>
             <a:fld id="{EC727D31-24EF-4195-9A9F-81F4CEA9F9FE}" type="datetimeFigureOut">
               <a:rPr lang="en-CA" smtClean="0"/>
-              <a:t>2026-09-03</a:t>
+              <a:t>2026-09-18</a:t>
             </a:fld>
             <a:endParaRPr lang="en-CA"/>
           </a:p>
@@ -2403,7 +2403,7 @@
           <a:p>
             <a:fld id="{EC727D31-24EF-4195-9A9F-81F4CEA9F9FE}" type="datetimeFigureOut">
               <a:rPr lang="en-CA" smtClean="0"/>
-              <a:t>2026-09-03</a:t>
+              <a:t>2026-09-18</a:t>
             </a:fld>
             <a:endParaRPr lang="en-CA"/>
           </a:p>
@@ -2692,7 +2692,7 @@
           <a:p>
             <a:fld id="{EC727D31-24EF-4195-9A9F-81F4CEA9F9FE}" type="datetimeFigureOut">
               <a:rPr lang="en-CA" smtClean="0"/>
-              <a:t>2026-09-03</a:t>
+              <a:t>2026-09-18</a:t>
             </a:fld>
             <a:endParaRPr lang="en-CA"/>
           </a:p>
@@ -2935,7 +2935,7 @@
           <a:p>
             <a:fld id="{EC727D31-24EF-4195-9A9F-81F4CEA9F9FE}" type="datetimeFigureOut">
               <a:rPr lang="en-CA" smtClean="0"/>
-              <a:t>2026-09-03</a:t>
+              <a:t>2026-09-18</a:t>
             </a:fld>
             <a:endParaRPr lang="en-CA"/>
           </a:p>
@@ -5320,7 +5320,7 @@
         </p:nvSpPr>
         <p:spPr>
           <a:xfrm>
-            <a:off x="578534" y="232837"/>
+            <a:off x="295580" y="475948"/>
             <a:ext cx="9409166" cy="5731933"/>
           </a:xfrm>
           <a:prstGeom prst="roundRect">
@@ -5637,76 +5637,6 @@
       </p:cxnSp>
       <p:sp>
         <p:nvSpPr>
-          <p:cNvPr id="18" name="TextBox 17">
-            <a:extLst>
-              <a:ext uri="{FF2B5EF4-FFF2-40B4-BE49-F238E27FC236}">
-                <a16:creationId xmlns:a16="http://schemas.microsoft.com/office/drawing/2014/main" id="{6892C8D6-2D53-87A1-95A3-1FC2538E0505}"/>
-              </a:ext>
-            </a:extLst>
-          </p:cNvPr>
-          <p:cNvSpPr txBox="1"/>
-          <p:nvPr/>
-        </p:nvSpPr>
-        <p:spPr>
-          <a:xfrm>
-            <a:off x="9297810" y="1504233"/>
-            <a:ext cx="308098" cy="369332"/>
-          </a:xfrm>
-          <a:prstGeom prst="rect">
-            <a:avLst/>
-          </a:prstGeom>
-          <a:noFill/>
-        </p:spPr>
-        <p:txBody>
-          <a:bodyPr wrap="none" rtlCol="0">
-            <a:spAutoFit/>
-          </a:bodyPr>
-          <a:lstStyle/>
-          <a:p>
-            <a:r>
-              <a:rPr lang="en-CA" dirty="0"/>
-              <a:t>1</a:t>
-            </a:r>
-          </a:p>
-        </p:txBody>
-      </p:sp>
-      <p:sp>
-        <p:nvSpPr>
-          <p:cNvPr id="20" name="TextBox 19">
-            <a:extLst>
-              <a:ext uri="{FF2B5EF4-FFF2-40B4-BE49-F238E27FC236}">
-                <a16:creationId xmlns:a16="http://schemas.microsoft.com/office/drawing/2014/main" id="{6A816F80-5DC7-9F4C-8AD6-A0F049FE3B20}"/>
-              </a:ext>
-            </a:extLst>
-          </p:cNvPr>
-          <p:cNvSpPr txBox="1"/>
-          <p:nvPr/>
-        </p:nvSpPr>
-        <p:spPr>
-          <a:xfrm>
-            <a:off x="7475260" y="1958501"/>
-            <a:ext cx="308098" cy="369332"/>
-          </a:xfrm>
-          <a:prstGeom prst="rect">
-            <a:avLst/>
-          </a:prstGeom>
-          <a:noFill/>
-        </p:spPr>
-        <p:txBody>
-          <a:bodyPr wrap="none" rtlCol="0">
-            <a:spAutoFit/>
-          </a:bodyPr>
-          <a:lstStyle/>
-          <a:p>
-            <a:r>
-              <a:rPr lang="en-CA" dirty="0"/>
-              <a:t>2</a:t>
-            </a:r>
-          </a:p>
-        </p:txBody>
-      </p:sp>
-      <p:sp>
-        <p:nvSpPr>
           <p:cNvPr id="22" name="Rectangle: Rounded Corners 21">
             <a:extLst>
               <a:ext uri="{FF2B5EF4-FFF2-40B4-BE49-F238E27FC236}">
@@ -5719,7 +5649,7 @@
         </p:nvSpPr>
         <p:spPr>
           <a:xfrm>
-            <a:off x="1069402" y="2758186"/>
+            <a:off x="578534" y="3177851"/>
             <a:ext cx="2472267" cy="770109"/>
           </a:xfrm>
           <a:prstGeom prst="roundRect">
@@ -5786,13 +5716,13 @@
           <p:nvPr/>
         </p:nvCxnSpPr>
         <p:spPr>
-          <a:xfrm>
-            <a:off x="3541669" y="3143241"/>
-            <a:ext cx="4442397" cy="258526"/>
+          <a:xfrm flipV="1">
+            <a:off x="3050801" y="3401767"/>
+            <a:ext cx="4933265" cy="161139"/>
           </a:xfrm>
           <a:prstGeom prst="bentConnector3">
             <a:avLst>
-              <a:gd name="adj1" fmla="val 35612"/>
+              <a:gd name="adj1" fmla="val 23492"/>
             </a:avLst>
           </a:prstGeom>
           <a:ln>
@@ -5816,41 +5746,6 @@
       </p:cxnSp>
       <p:sp>
         <p:nvSpPr>
-          <p:cNvPr id="28" name="TextBox 27">
-            <a:extLst>
-              <a:ext uri="{FF2B5EF4-FFF2-40B4-BE49-F238E27FC236}">
-                <a16:creationId xmlns:a16="http://schemas.microsoft.com/office/drawing/2014/main" id="{9BCF0C18-9A7C-D377-58DD-353033B7D1E2}"/>
-              </a:ext>
-            </a:extLst>
-          </p:cNvPr>
-          <p:cNvSpPr txBox="1"/>
-          <p:nvPr/>
-        </p:nvSpPr>
-        <p:spPr>
-          <a:xfrm>
-            <a:off x="6082126" y="2334778"/>
-            <a:ext cx="308098" cy="369332"/>
-          </a:xfrm>
-          <a:prstGeom prst="rect">
-            <a:avLst/>
-          </a:prstGeom>
-          <a:noFill/>
-        </p:spPr>
-        <p:txBody>
-          <a:bodyPr wrap="none" rtlCol="0">
-            <a:spAutoFit/>
-          </a:bodyPr>
-          <a:lstStyle/>
-          <a:p>
-            <a:r>
-              <a:rPr lang="en-CA" dirty="0"/>
-              <a:t>3</a:t>
-            </a:r>
-          </a:p>
-        </p:txBody>
-      </p:sp>
-      <p:sp>
-        <p:nvSpPr>
           <p:cNvPr id="32" name="Rectangle: Rounded Corners 31">
             <a:extLst>
               <a:ext uri="{FF2B5EF4-FFF2-40B4-BE49-F238E27FC236}">
@@ -5863,7 +5758,7 @@
         </p:nvSpPr>
         <p:spPr>
           <a:xfrm>
-            <a:off x="1621375" y="636918"/>
+            <a:off x="1814667" y="702137"/>
             <a:ext cx="2472267" cy="770109"/>
           </a:xfrm>
           <a:prstGeom prst="roundRect">
@@ -5922,12 +5817,12 @@
         </p:nvCxnSpPr>
         <p:spPr>
           <a:xfrm>
-            <a:off x="4093642" y="1021973"/>
-            <a:ext cx="3890424" cy="2379794"/>
+            <a:off x="4286934" y="1087192"/>
+            <a:ext cx="3697132" cy="2314575"/>
           </a:xfrm>
           <a:prstGeom prst="bentConnector3">
             <a:avLst>
-              <a:gd name="adj1" fmla="val 50000"/>
+              <a:gd name="adj1" fmla="val 39628"/>
             </a:avLst>
           </a:prstGeom>
           <a:ln>
@@ -5951,41 +5846,6 @@
       </p:cxnSp>
       <p:sp>
         <p:nvSpPr>
-          <p:cNvPr id="37" name="TextBox 36">
-            <a:extLst>
-              <a:ext uri="{FF2B5EF4-FFF2-40B4-BE49-F238E27FC236}">
-                <a16:creationId xmlns:a16="http://schemas.microsoft.com/office/drawing/2014/main" id="{700210B8-2B04-10F4-2EFF-74F9122730B3}"/>
-              </a:ext>
-            </a:extLst>
-          </p:cNvPr>
-          <p:cNvSpPr txBox="1"/>
-          <p:nvPr/>
-        </p:nvSpPr>
-        <p:spPr>
-          <a:xfrm>
-            <a:off x="5417301" y="2545333"/>
-            <a:ext cx="308098" cy="369332"/>
-          </a:xfrm>
-          <a:prstGeom prst="rect">
-            <a:avLst/>
-          </a:prstGeom>
-          <a:noFill/>
-        </p:spPr>
-        <p:txBody>
-          <a:bodyPr wrap="none" rtlCol="0">
-            <a:spAutoFit/>
-          </a:bodyPr>
-          <a:lstStyle/>
-          <a:p>
-            <a:r>
-              <a:rPr lang="en-CA" dirty="0"/>
-              <a:t>4</a:t>
-            </a:r>
-          </a:p>
-        </p:txBody>
-      </p:sp>
-      <p:sp>
-        <p:nvSpPr>
           <p:cNvPr id="38" name="Rectangle: Rounded Corners 37">
             <a:extLst>
               <a:ext uri="{FF2B5EF4-FFF2-40B4-BE49-F238E27FC236}">
@@ -5998,7 +5858,7 @@
         </p:nvSpPr>
         <p:spPr>
           <a:xfrm>
-            <a:off x="853728" y="4917531"/>
+            <a:off x="762341" y="4497011"/>
             <a:ext cx="2472267" cy="770109"/>
           </a:xfrm>
           <a:prstGeom prst="roundRect">
@@ -6051,8 +5911,8 @@
         </p:nvCxnSpPr>
         <p:spPr>
           <a:xfrm flipV="1">
-            <a:off x="6289272" y="3401767"/>
-            <a:ext cx="1694794" cy="916444"/>
+            <a:off x="6807482" y="3401767"/>
+            <a:ext cx="1176584" cy="693575"/>
           </a:xfrm>
           <a:prstGeom prst="bentConnector3">
             <a:avLst>
@@ -6080,41 +5940,6 @@
       </p:cxnSp>
       <p:sp>
         <p:nvSpPr>
-          <p:cNvPr id="40" name="TextBox 39">
-            <a:extLst>
-              <a:ext uri="{FF2B5EF4-FFF2-40B4-BE49-F238E27FC236}">
-                <a16:creationId xmlns:a16="http://schemas.microsoft.com/office/drawing/2014/main" id="{BB5DABC0-ADA4-A818-26A1-2201CA5FE6A1}"/>
-              </a:ext>
-            </a:extLst>
-          </p:cNvPr>
-          <p:cNvSpPr txBox="1"/>
-          <p:nvPr/>
-        </p:nvSpPr>
-        <p:spPr>
-          <a:xfrm>
-            <a:off x="4498744" y="2709418"/>
-            <a:ext cx="308098" cy="369332"/>
-          </a:xfrm>
-          <a:prstGeom prst="rect">
-            <a:avLst/>
-          </a:prstGeom>
-          <a:noFill/>
-        </p:spPr>
-        <p:txBody>
-          <a:bodyPr wrap="none" rtlCol="0">
-            <a:spAutoFit/>
-          </a:bodyPr>
-          <a:lstStyle/>
-          <a:p>
-            <a:r>
-              <a:rPr lang="en-CA" dirty="0"/>
-              <a:t>5</a:t>
-            </a:r>
-          </a:p>
-        </p:txBody>
-      </p:sp>
-      <p:sp>
-        <p:nvSpPr>
           <p:cNvPr id="4" name="Rectangle: Rounded Corners 3">
             <a:extLst>
               <a:ext uri="{FF2B5EF4-FFF2-40B4-BE49-F238E27FC236}">
@@ -6127,7 +5952,7 @@
         </p:nvSpPr>
         <p:spPr>
           <a:xfrm>
-            <a:off x="3817005" y="3933156"/>
+            <a:off x="4335215" y="3710287"/>
             <a:ext cx="2472267" cy="770109"/>
           </a:xfrm>
           <a:prstGeom prst="roundRect">
@@ -6155,10 +5980,9 @@
           <a:p>
             <a:pPr algn="ctr"/>
             <a:r>
-              <a:rPr lang="en-CA" dirty="0" err="1"/>
-              <a:t>Fastapi</a:t>
-            </a:r>
-            <a:endParaRPr lang="en-CA" dirty="0"/>
+              <a:rPr lang="en-CA" dirty="0"/>
+              <a:t>Prediction</a:t>
+            </a:r>
           </a:p>
         </p:txBody>
       </p:sp>
@@ -6176,7 +6000,7 @@
         </p:nvSpPr>
         <p:spPr>
           <a:xfrm>
-            <a:off x="1355841" y="1697552"/>
+            <a:off x="1039231" y="1775224"/>
             <a:ext cx="2472267" cy="770109"/>
           </a:xfrm>
           <a:prstGeom prst="roundRect">
@@ -6239,12 +6063,12 @@
         </p:nvCxnSpPr>
         <p:spPr>
           <a:xfrm>
-            <a:off x="3828108" y="2082607"/>
-            <a:ext cx="4155958" cy="1319160"/>
+            <a:off x="3511498" y="2160279"/>
+            <a:ext cx="4472568" cy="1241488"/>
           </a:xfrm>
           <a:prstGeom prst="bentConnector3">
             <a:avLst>
-              <a:gd name="adj1" fmla="val 31416"/>
+              <a:gd name="adj1" fmla="val 50000"/>
             </a:avLst>
           </a:prstGeom>
           <a:ln>
@@ -6266,41 +6090,6 @@
           </a:fontRef>
         </p:style>
       </p:cxnSp>
-      <p:sp>
-        <p:nvSpPr>
-          <p:cNvPr id="74" name="TextBox 73">
-            <a:extLst>
-              <a:ext uri="{FF2B5EF4-FFF2-40B4-BE49-F238E27FC236}">
-                <a16:creationId xmlns:a16="http://schemas.microsoft.com/office/drawing/2014/main" id="{FF8F3293-4903-6E20-6F4A-3BE9C8E11E1C}"/>
-              </a:ext>
-            </a:extLst>
-          </p:cNvPr>
-          <p:cNvSpPr txBox="1"/>
-          <p:nvPr/>
-        </p:nvSpPr>
-        <p:spPr>
-          <a:xfrm>
-            <a:off x="4723833" y="4917531"/>
-            <a:ext cx="308098" cy="369332"/>
-          </a:xfrm>
-          <a:prstGeom prst="rect">
-            <a:avLst/>
-          </a:prstGeom>
-          <a:noFill/>
-        </p:spPr>
-        <p:txBody>
-          <a:bodyPr wrap="none" rtlCol="0">
-            <a:spAutoFit/>
-          </a:bodyPr>
-          <a:lstStyle/>
-          <a:p>
-            <a:r>
-              <a:rPr lang="en-CA" dirty="0"/>
-              <a:t>6</a:t>
-            </a:r>
-          </a:p>
-        </p:txBody>
-      </p:sp>
       <p:cxnSp>
         <p:nvCxnSpPr>
           <p:cNvPr id="80" name="Connector: Elbow 79">
@@ -6311,18 +6100,21 @@
             </a:extLst>
           </p:cNvPr>
           <p:cNvCxnSpPr>
-            <a:stCxn id="4" idx="2"/>
-            <a:endCxn id="38" idx="3"/>
+            <a:cxnSpLocks/>
+            <a:stCxn id="13" idx="0"/>
+            <a:endCxn id="4" idx="2"/>
           </p:cNvCxnSpPr>
           <p:nvPr/>
         </p:nvCxnSpPr>
         <p:spPr>
-          <a:xfrm rot="5400000">
-            <a:off x="3889907" y="4139353"/>
-            <a:ext cx="599321" cy="1727144"/>
-          </a:xfrm>
-          <a:prstGeom prst="bentConnector2">
-            <a:avLst/>
+          <a:xfrm rot="16200000" flipV="1">
+            <a:off x="5368404" y="4683341"/>
+            <a:ext cx="405892" cy="1"/>
+          </a:xfrm>
+          <a:prstGeom prst="bentConnector3">
+            <a:avLst>
+              <a:gd name="adj1" fmla="val 50000"/>
+            </a:avLst>
           </a:prstGeom>
           <a:ln w="19050" cap="flat" cmpd="sng" algn="ctr">
             <a:solidFill>
@@ -6343,6 +6135,101 @@
           </a:fillRef>
           <a:effectRef idx="0">
             <a:scrgbClr r="0" g="0" b="0"/>
+          </a:effectRef>
+          <a:fontRef idx="minor">
+            <a:schemeClr val="tx1"/>
+          </a:fontRef>
+        </p:style>
+      </p:cxnSp>
+      <p:sp>
+        <p:nvSpPr>
+          <p:cNvPr id="13" name="Rectangle: Rounded Corners 12">
+            <a:extLst>
+              <a:ext uri="{FF2B5EF4-FFF2-40B4-BE49-F238E27FC236}">
+                <a16:creationId xmlns:a16="http://schemas.microsoft.com/office/drawing/2014/main" id="{B5E10514-49D5-161C-2FFF-61CB6206275F}"/>
+              </a:ext>
+            </a:extLst>
+          </p:cNvPr>
+          <p:cNvSpPr/>
+          <p:nvPr/>
+        </p:nvSpPr>
+        <p:spPr>
+          <a:xfrm>
+            <a:off x="4335216" y="4886288"/>
+            <a:ext cx="2472267" cy="770109"/>
+          </a:xfrm>
+          <a:prstGeom prst="roundRect">
+            <a:avLst/>
+          </a:prstGeom>
+          <a:ln w="57150"/>
+        </p:spPr>
+        <p:style>
+          <a:lnRef idx="2">
+            <a:schemeClr val="accent6"/>
+          </a:lnRef>
+          <a:fillRef idx="1">
+            <a:schemeClr val="lt1"/>
+          </a:fillRef>
+          <a:effectRef idx="0">
+            <a:schemeClr val="accent6"/>
+          </a:effectRef>
+          <a:fontRef idx="minor">
+            <a:schemeClr val="dk1"/>
+          </a:fontRef>
+        </p:style>
+        <p:txBody>
+          <a:bodyPr rtlCol="0" anchor="ctr"/>
+          <a:lstStyle/>
+          <a:p>
+            <a:pPr algn="ctr"/>
+            <a:r>
+              <a:rPr lang="en-CA" dirty="0" err="1"/>
+              <a:t>FastApi</a:t>
+            </a:r>
+            <a:endParaRPr lang="en-CA" dirty="0"/>
+          </a:p>
+        </p:txBody>
+      </p:sp>
+      <p:cxnSp>
+        <p:nvCxnSpPr>
+          <p:cNvPr id="24" name="Connector: Elbow 23">
+            <a:extLst>
+              <a:ext uri="{FF2B5EF4-FFF2-40B4-BE49-F238E27FC236}">
+                <a16:creationId xmlns:a16="http://schemas.microsoft.com/office/drawing/2014/main" id="{F436B5A1-4E0D-FCEF-C523-67624E91CDD3}"/>
+              </a:ext>
+            </a:extLst>
+          </p:cNvPr>
+          <p:cNvCxnSpPr>
+            <a:cxnSpLocks/>
+            <a:stCxn id="38" idx="3"/>
+            <a:endCxn id="13" idx="1"/>
+          </p:cNvCxnSpPr>
+          <p:nvPr/>
+        </p:nvCxnSpPr>
+        <p:spPr>
+          <a:xfrm>
+            <a:off x="3234608" y="4882066"/>
+            <a:ext cx="1100608" cy="389277"/>
+          </a:xfrm>
+          <a:prstGeom prst="bentConnector3">
+            <a:avLst>
+              <a:gd name="adj1" fmla="val 50000"/>
+            </a:avLst>
+          </a:prstGeom>
+          <a:ln>
+            <a:headEnd type="none" w="med" len="med"/>
+            <a:tailEnd type="arrow" w="med" len="med"/>
+          </a:ln>
+        </p:spPr>
+        <p:style>
+          <a:lnRef idx="3">
+            <a:schemeClr val="accent2"/>
+          </a:lnRef>
+          <a:fillRef idx="0">
+            <a:schemeClr val="accent2"/>
+          </a:fillRef>
+          <a:effectRef idx="2">
+            <a:schemeClr val="accent2"/>
           </a:effectRef>
           <a:fontRef idx="minor">
             <a:schemeClr val="tx1"/>
